--- a/templates/原生报告模板.pptx
+++ b/templates/原生报告模板.pptx
@@ -18,9 +18,7 @@
     <p:sldId id="267" r:id="rId12"/>
     <p:sldId id="269" r:id="rId13"/>
     <p:sldId id="270" r:id="rId14"/>
-    <p:sldId id="271" r:id="rId15"/>
-    <p:sldId id="273" r:id="rId16"/>
-    <p:sldId id="268" r:id="rId17"/>
+    <p:sldId id="268" r:id="rId15"/>
   </p:sldIdLst>
   <p:sldSz cx="12192000" cy="6858000"/>
   <p:notesSz cx="6858000" cy="9144000"/>
@@ -3473,8 +3471,8 @@
         </p:nvSpPr>
         <p:spPr>
           <a:xfrm>
-            <a:off x="592666" y="1524001"/>
-            <a:ext cx="5985933" cy="369332"/>
+            <a:off x="481155" y="189000"/>
+            <a:ext cx="7503119" cy="6480000"/>
           </a:xfrm>
           <a:prstGeom prst="rect">
             <a:avLst/>
@@ -3517,7 +3515,7 @@
         </p:nvSpPr>
         <p:spPr>
           <a:xfrm>
-            <a:off x="6968066" y="1498603"/>
+            <a:off x="8328515" y="1498603"/>
             <a:ext cx="4300159" cy="369332"/>
           </a:xfrm>
           <a:prstGeom prst="rect">
@@ -3591,8 +3589,8 @@
         </p:nvSpPr>
         <p:spPr>
           <a:xfrm>
-            <a:off x="618067" y="1261533"/>
-            <a:ext cx="6172200" cy="369332"/>
+            <a:off x="588331" y="1142586"/>
+            <a:ext cx="6172200" cy="5400000"/>
           </a:xfrm>
           <a:prstGeom prst="rect">
             <a:avLst/>
@@ -3679,230 +3677,6 @@
 </file>
 
 <file path=ppt/slides/slide14.xml><?xml version="1.0" encoding="utf-8"?>
-<p:sld xmlns:a="http://schemas.openxmlformats.org/drawingml/2006/main" xmlns:r="http://schemas.openxmlformats.org/officeDocument/2006/relationships" xmlns:p="http://schemas.openxmlformats.org/presentationml/2006/main">
-  <p:cSld>
-    <p:spTree>
-      <p:nvGrpSpPr>
-        <p:cNvPr id="1" name="">
-          <a:extLst>
-            <a:ext uri="{FF2B5EF4-FFF2-40B4-BE49-F238E27FC236}">
-              <a16:creationId xmlns:a16="http://schemas.microsoft.com/office/drawing/2014/main" id="{AD32B738-3E6A-4A09-AC6B-F87EDD35B89A}"/>
-            </a:ext>
-          </a:extLst>
-        </p:cNvPr>
-        <p:cNvGrpSpPr/>
-        <p:nvPr/>
-      </p:nvGrpSpPr>
-      <p:grpSpPr>
-        <a:xfrm>
-          <a:off x="0" y="0"/>
-          <a:ext cx="0" cy="0"/>
-          <a:chOff x="0" y="0"/>
-          <a:chExt cx="0" cy="0"/>
-        </a:xfrm>
-      </p:grpSpPr>
-      <p:sp>
-        <p:nvSpPr>
-          <p:cNvPr id="4" name="文本框 3">
-            <a:extLst>
-              <a:ext uri="{FF2B5EF4-FFF2-40B4-BE49-F238E27FC236}">
-                <a16:creationId xmlns:a16="http://schemas.microsoft.com/office/drawing/2014/main" id="{61F36911-9F02-CF18-3C07-D893713B6E19}"/>
-              </a:ext>
-            </a:extLst>
-          </p:cNvPr>
-          <p:cNvSpPr txBox="1"/>
-          <p:nvPr/>
-        </p:nvSpPr>
-        <p:spPr>
-          <a:xfrm>
-            <a:off x="618067" y="1261533"/>
-            <a:ext cx="6172200" cy="369332"/>
-          </a:xfrm>
-          <a:prstGeom prst="rect">
-            <a:avLst/>
-          </a:prstGeom>
-          <a:noFill/>
-        </p:spPr>
-        <p:txBody>
-          <a:bodyPr wrap="square" rtlCol="0">
-            <a:spAutoFit/>
-          </a:bodyPr>
-          <a:lstStyle/>
-          <a:p>
-            <a:r>
-              <a:rPr lang="en-US" altLang="zh-CN" dirty="0"/>
-              <a:t>[</a:t>
-            </a:r>
-            <a:r>
-              <a:rPr lang="en-US" altLang="zh-CN" dirty="0" err="1"/>
-              <a:t>CHART:city_sales_ranking</a:t>
-            </a:r>
-            <a:r>
-              <a:rPr lang="en-US" altLang="zh-CN" dirty="0"/>
-              <a:t>]</a:t>
-            </a:r>
-            <a:endParaRPr lang="zh-CN" altLang="en-US" dirty="0"/>
-          </a:p>
-        </p:txBody>
-      </p:sp>
-      <p:sp>
-        <p:nvSpPr>
-          <p:cNvPr id="5" name="文本框 4">
-            <a:extLst>
-              <a:ext uri="{FF2B5EF4-FFF2-40B4-BE49-F238E27FC236}">
-                <a16:creationId xmlns:a16="http://schemas.microsoft.com/office/drawing/2014/main" id="{AF816E85-15F3-BD16-400A-57C86B775B1F}"/>
-              </a:ext>
-            </a:extLst>
-          </p:cNvPr>
-          <p:cNvSpPr txBox="1"/>
-          <p:nvPr/>
-        </p:nvSpPr>
-        <p:spPr>
-          <a:xfrm>
-            <a:off x="7238999" y="1261533"/>
-            <a:ext cx="4622800" cy="369332"/>
-          </a:xfrm>
-          <a:prstGeom prst="rect">
-            <a:avLst/>
-          </a:prstGeom>
-          <a:noFill/>
-        </p:spPr>
-        <p:txBody>
-          <a:bodyPr wrap="square" rtlCol="0">
-            <a:spAutoFit/>
-          </a:bodyPr>
-          <a:lstStyle/>
-          <a:p>
-            <a:endParaRPr lang="zh-CN" altLang="en-US" dirty="0"/>
-          </a:p>
-        </p:txBody>
-      </p:sp>
-    </p:spTree>
-    <p:extLst>
-      <p:ext uri="{BB962C8B-B14F-4D97-AF65-F5344CB8AC3E}">
-        <p14:creationId xmlns:p14="http://schemas.microsoft.com/office/powerpoint/2010/main" val="3738931792"/>
-      </p:ext>
-    </p:extLst>
-  </p:cSld>
-  <p:clrMapOvr>
-    <a:masterClrMapping/>
-  </p:clrMapOvr>
-</p:sld>
-</file>
-
-<file path=ppt/slides/slide15.xml><?xml version="1.0" encoding="utf-8"?>
-<p:sld xmlns:a="http://schemas.openxmlformats.org/drawingml/2006/main" xmlns:r="http://schemas.openxmlformats.org/officeDocument/2006/relationships" xmlns:p="http://schemas.openxmlformats.org/presentationml/2006/main">
-  <p:cSld>
-    <p:spTree>
-      <p:nvGrpSpPr>
-        <p:cNvPr id="1" name="">
-          <a:extLst>
-            <a:ext uri="{FF2B5EF4-FFF2-40B4-BE49-F238E27FC236}">
-              <a16:creationId xmlns:a16="http://schemas.microsoft.com/office/drawing/2014/main" id="{17527A68-AC2D-9E3A-DA71-353DBB3D3D52}"/>
-            </a:ext>
-          </a:extLst>
-        </p:cNvPr>
-        <p:cNvGrpSpPr/>
-        <p:nvPr/>
-      </p:nvGrpSpPr>
-      <p:grpSpPr>
-        <a:xfrm>
-          <a:off x="0" y="0"/>
-          <a:ext cx="0" cy="0"/>
-          <a:chOff x="0" y="0"/>
-          <a:chExt cx="0" cy="0"/>
-        </a:xfrm>
-      </p:grpSpPr>
-      <p:sp>
-        <p:nvSpPr>
-          <p:cNvPr id="4" name="文本框 3">
-            <a:extLst>
-              <a:ext uri="{FF2B5EF4-FFF2-40B4-BE49-F238E27FC236}">
-                <a16:creationId xmlns:a16="http://schemas.microsoft.com/office/drawing/2014/main" id="{B861AAB3-5EBD-D241-1BE9-D84EA934CED2}"/>
-              </a:ext>
-            </a:extLst>
-          </p:cNvPr>
-          <p:cNvSpPr txBox="1"/>
-          <p:nvPr/>
-        </p:nvSpPr>
-        <p:spPr>
-          <a:xfrm>
-            <a:off x="618067" y="1261533"/>
-            <a:ext cx="6172200" cy="369332"/>
-          </a:xfrm>
-          <a:prstGeom prst="rect">
-            <a:avLst/>
-          </a:prstGeom>
-          <a:noFill/>
-        </p:spPr>
-        <p:txBody>
-          <a:bodyPr wrap="square" rtlCol="0">
-            <a:spAutoFit/>
-          </a:bodyPr>
-          <a:lstStyle/>
-          <a:p>
-            <a:r>
-              <a:rPr lang="en-US" altLang="zh-CN" dirty="0"/>
-              <a:t>[</a:t>
-            </a:r>
-            <a:r>
-              <a:rPr lang="en-US" altLang="zh-CN" dirty="0" err="1"/>
-              <a:t>CHART:category_pie</a:t>
-            </a:r>
-            <a:r>
-              <a:rPr lang="en-US" altLang="zh-CN" dirty="0"/>
-              <a:t>]</a:t>
-            </a:r>
-            <a:endParaRPr lang="zh-CN" altLang="en-US" dirty="0"/>
-          </a:p>
-        </p:txBody>
-      </p:sp>
-      <p:sp>
-        <p:nvSpPr>
-          <p:cNvPr id="5" name="文本框 4">
-            <a:extLst>
-              <a:ext uri="{FF2B5EF4-FFF2-40B4-BE49-F238E27FC236}">
-                <a16:creationId xmlns:a16="http://schemas.microsoft.com/office/drawing/2014/main" id="{A8B4C311-1EE0-A8B7-E1F1-C52114B30F71}"/>
-              </a:ext>
-            </a:extLst>
-          </p:cNvPr>
-          <p:cNvSpPr txBox="1"/>
-          <p:nvPr/>
-        </p:nvSpPr>
-        <p:spPr>
-          <a:xfrm>
-            <a:off x="7238999" y="1261533"/>
-            <a:ext cx="4622800" cy="369332"/>
-          </a:xfrm>
-          <a:prstGeom prst="rect">
-            <a:avLst/>
-          </a:prstGeom>
-          <a:noFill/>
-        </p:spPr>
-        <p:txBody>
-          <a:bodyPr wrap="square" rtlCol="0">
-            <a:spAutoFit/>
-          </a:bodyPr>
-          <a:lstStyle/>
-          <a:p>
-            <a:endParaRPr lang="zh-CN" altLang="en-US" dirty="0"/>
-          </a:p>
-        </p:txBody>
-      </p:sp>
-    </p:spTree>
-    <p:extLst>
-      <p:ext uri="{BB962C8B-B14F-4D97-AF65-F5344CB8AC3E}">
-        <p14:creationId xmlns:p14="http://schemas.microsoft.com/office/powerpoint/2010/main" val="3071196339"/>
-      </p:ext>
-    </p:extLst>
-  </p:cSld>
-  <p:clrMapOvr>
-    <a:masterClrMapping/>
-  </p:clrMapOvr>
-</p:sld>
-</file>
-
-<file path=ppt/slides/slide16.xml><?xml version="1.0" encoding="utf-8"?>
 <p:sld xmlns:a="http://schemas.openxmlformats.org/drawingml/2006/main" xmlns:r="http://schemas.openxmlformats.org/officeDocument/2006/relationships" xmlns:p="http://schemas.openxmlformats.org/presentationml/2006/main">
   <p:cSld>
     <p:spTree>
@@ -4635,7 +4409,7 @@
         <p:spPr>
           <a:xfrm>
             <a:off x="768626" y="1417638"/>
-            <a:ext cx="6096000" cy="369332"/>
+            <a:ext cx="6096000" cy="5040000"/>
           </a:xfrm>
           <a:prstGeom prst="rect">
             <a:avLst/>
@@ -4724,7 +4498,7 @@
         </p:nvSpPr>
         <p:spPr>
           <a:xfrm>
-            <a:off x="5760720" y="1371600"/>
+            <a:off x="6659217" y="1371600"/>
             <a:ext cx="4067717" cy="369332"/>
           </a:xfrm>
           <a:prstGeom prst="rect">
@@ -4769,7 +4543,7 @@
         <p:spPr>
           <a:xfrm>
             <a:off x="563217" y="1481794"/>
-            <a:ext cx="6096000" cy="369332"/>
+            <a:ext cx="6096000" cy="5040000"/>
           </a:xfrm>
           <a:prstGeom prst="rect">
             <a:avLst/>
@@ -4903,7 +4677,7 @@
         <p:spPr>
           <a:xfrm>
             <a:off x="602974" y="1393196"/>
-            <a:ext cx="6096000" cy="369332"/>
+            <a:ext cx="6096000" cy="5040000"/>
           </a:xfrm>
           <a:prstGeom prst="rect">
             <a:avLst/>
@@ -5029,7 +4803,7 @@
         <p:spPr>
           <a:xfrm>
             <a:off x="616227" y="1436785"/>
-            <a:ext cx="6321286" cy="369332"/>
+            <a:ext cx="6321286" cy="5040000"/>
           </a:xfrm>
           <a:prstGeom prst="rect">
             <a:avLst/>
@@ -5090,7 +4864,7 @@
         </p:nvSpPr>
         <p:spPr>
           <a:xfrm>
-            <a:off x="457200" y="5212080"/>
+            <a:off x="8077047" y="1377512"/>
             <a:ext cx="9544556" cy="369332"/>
           </a:xfrm>
           <a:prstGeom prst="rect">
@@ -5162,8 +4936,8 @@
         </p:nvSpPr>
         <p:spPr>
           <a:xfrm>
-            <a:off x="384313" y="1469916"/>
-            <a:ext cx="6096000" cy="369332"/>
+            <a:off x="666091" y="1116450"/>
+            <a:ext cx="6096000" cy="5040000"/>
           </a:xfrm>
           <a:prstGeom prst="rect">
             <a:avLst/>
@@ -5252,8 +5026,8 @@
         </p:nvSpPr>
         <p:spPr>
           <a:xfrm>
-            <a:off x="457200" y="5212080"/>
-            <a:ext cx="4093300" cy="369332"/>
+            <a:off x="7480407" y="1715211"/>
+            <a:ext cx="4166077" cy="369332"/>
           </a:xfrm>
           <a:prstGeom prst="rect">
             <a:avLst/>
@@ -5272,7 +5046,7 @@
             </a:r>
             <a:r>
               <a:rPr lang="en-US" dirty="0" err="1"/>
-              <a:t>INSIGHT:order_status_distribution_pie</a:t>
+              <a:t>INSIGHT:order_status_composition_pie</a:t>
             </a:r>
             <a:r>
               <a:rPr lang="en-US" dirty="0"/>
@@ -5296,8 +5070,8 @@
         </p:nvSpPr>
         <p:spPr>
           <a:xfrm>
-            <a:off x="649356" y="1415189"/>
-            <a:ext cx="6096000" cy="369332"/>
+            <a:off x="265155" y="1340797"/>
+            <a:ext cx="6096000" cy="5040000"/>
           </a:xfrm>
           <a:prstGeom prst="rect">
             <a:avLst/>
@@ -5316,7 +5090,7 @@
             </a:r>
             <a:r>
               <a:rPr lang="en-US" altLang="zh-CN" dirty="0" err="1"/>
-              <a:t>CHART:order_status_distribution_pie</a:t>
+              <a:t>CHART:order_status_composition_pie</a:t>
             </a:r>
             <a:r>
               <a:rPr lang="en-US" altLang="zh-CN" dirty="0"/>

--- a/templates/原生报告模板.pptx
+++ b/templates/原生报告模板.pptx
@@ -315,7 +315,7 @@
           <a:p>
             <a:fld id="{5BCAD085-E8A6-8845-BD4E-CB4CCA059FC4}" type="datetimeFigureOut">
               <a:rPr lang="en-US" smtClean="0"/>
-              <a:t>4/12/2026</a:t>
+              <a:t>4/13/2026</a:t>
             </a:fld>
             <a:endParaRPr lang="en-US"/>
           </a:p>
@@ -483,7 +483,7 @@
           <a:p>
             <a:fld id="{5BCAD085-E8A6-8845-BD4E-CB4CCA059FC4}" type="datetimeFigureOut">
               <a:rPr lang="en-US" smtClean="0"/>
-              <a:t>4/12/2026</a:t>
+              <a:t>4/13/2026</a:t>
             </a:fld>
             <a:endParaRPr lang="en-US"/>
           </a:p>
@@ -661,7 +661,7 @@
           <a:p>
             <a:fld id="{5BCAD085-E8A6-8845-BD4E-CB4CCA059FC4}" type="datetimeFigureOut">
               <a:rPr lang="en-US" smtClean="0"/>
-              <a:t>4/12/2026</a:t>
+              <a:t>4/13/2026</a:t>
             </a:fld>
             <a:endParaRPr lang="en-US"/>
           </a:p>
@@ -829,7 +829,7 @@
           <a:p>
             <a:fld id="{5BCAD085-E8A6-8845-BD4E-CB4CCA059FC4}" type="datetimeFigureOut">
               <a:rPr lang="en-US" smtClean="0"/>
-              <a:t>4/12/2026</a:t>
+              <a:t>4/13/2026</a:t>
             </a:fld>
             <a:endParaRPr lang="en-US"/>
           </a:p>
@@ -1074,7 +1074,7 @@
           <a:p>
             <a:fld id="{5BCAD085-E8A6-8845-BD4E-CB4CCA059FC4}" type="datetimeFigureOut">
               <a:rPr lang="en-US" smtClean="0"/>
-              <a:t>4/12/2026</a:t>
+              <a:t>4/13/2026</a:t>
             </a:fld>
             <a:endParaRPr lang="en-US"/>
           </a:p>
@@ -1359,7 +1359,7 @@
           <a:p>
             <a:fld id="{5BCAD085-E8A6-8845-BD4E-CB4CCA059FC4}" type="datetimeFigureOut">
               <a:rPr lang="en-US" smtClean="0"/>
-              <a:t>4/12/2026</a:t>
+              <a:t>4/13/2026</a:t>
             </a:fld>
             <a:endParaRPr lang="en-US"/>
           </a:p>
@@ -1778,7 +1778,7 @@
           <a:p>
             <a:fld id="{5BCAD085-E8A6-8845-BD4E-CB4CCA059FC4}" type="datetimeFigureOut">
               <a:rPr lang="en-US" smtClean="0"/>
-              <a:t>4/12/2026</a:t>
+              <a:t>4/13/2026</a:t>
             </a:fld>
             <a:endParaRPr lang="en-US"/>
           </a:p>
@@ -1895,7 +1895,7 @@
           <a:p>
             <a:fld id="{5BCAD085-E8A6-8845-BD4E-CB4CCA059FC4}" type="datetimeFigureOut">
               <a:rPr lang="en-US" smtClean="0"/>
-              <a:t>4/12/2026</a:t>
+              <a:t>4/13/2026</a:t>
             </a:fld>
             <a:endParaRPr lang="en-US"/>
           </a:p>
@@ -1990,7 +1990,7 @@
           <a:p>
             <a:fld id="{5BCAD085-E8A6-8845-BD4E-CB4CCA059FC4}" type="datetimeFigureOut">
               <a:rPr lang="en-US" smtClean="0"/>
-              <a:t>4/12/2026</a:t>
+              <a:t>4/13/2026</a:t>
             </a:fld>
             <a:endParaRPr lang="en-US"/>
           </a:p>
@@ -2265,7 +2265,7 @@
           <a:p>
             <a:fld id="{5BCAD085-E8A6-8845-BD4E-CB4CCA059FC4}" type="datetimeFigureOut">
               <a:rPr lang="en-US" smtClean="0"/>
-              <a:t>4/12/2026</a:t>
+              <a:t>4/13/2026</a:t>
             </a:fld>
             <a:endParaRPr lang="en-US"/>
           </a:p>
@@ -2517,7 +2517,7 @@
           <a:p>
             <a:fld id="{5BCAD085-E8A6-8845-BD4E-CB4CCA059FC4}" type="datetimeFigureOut">
               <a:rPr lang="en-US" smtClean="0"/>
-              <a:t>4/12/2026</a:t>
+              <a:t>4/13/2026</a:t>
             </a:fld>
             <a:endParaRPr lang="en-US"/>
           </a:p>
@@ -2728,7 +2728,7 @@
           <a:p>
             <a:fld id="{5BCAD085-E8A6-8845-BD4E-CB4CCA059FC4}" type="datetimeFigureOut">
               <a:rPr lang="en-US" smtClean="0"/>
-              <a:t>4/12/2026</a:t>
+              <a:t>4/13/2026</a:t>
             </a:fld>
             <a:endParaRPr lang="en-US"/>
           </a:p>
@@ -4409,7 +4409,7 @@
         <p:spPr>
           <a:xfrm>
             <a:off x="768626" y="1417638"/>
-            <a:ext cx="6096000" cy="5040000"/>
+            <a:ext cx="6096000" cy="369332"/>
           </a:xfrm>
           <a:prstGeom prst="rect">
             <a:avLst/>
@@ -4428,7 +4428,7 @@
             </a:r>
             <a:r>
               <a:rPr lang="en-US" altLang="zh-CN" dirty="0" err="1"/>
-              <a:t>CHART:core_kpi_summary</a:t>
+              <a:t>CHART:core_kpi_horizontal_bar</a:t>
             </a:r>
             <a:r>
               <a:rPr lang="en-US" altLang="zh-CN" dirty="0"/>
@@ -4543,7 +4543,7 @@
         <p:spPr>
           <a:xfrm>
             <a:off x="563217" y="1481794"/>
-            <a:ext cx="6096000" cy="5040000"/>
+            <a:ext cx="6096000" cy="369332"/>
           </a:xfrm>
           <a:prstGeom prst="rect">
             <a:avLst/>
@@ -4562,7 +4562,7 @@
             </a:r>
             <a:r>
               <a:rPr lang="en-US" altLang="zh-CN" dirty="0" err="1"/>
-              <a:t>CHART:city_sales_ranking_horizontal</a:t>
+              <a:t>CHART:customer_segment_ranking_bar</a:t>
             </a:r>
             <a:r>
               <a:rPr lang="en-US" altLang="zh-CN" dirty="0"/>
@@ -4677,7 +4677,7 @@
         <p:spPr>
           <a:xfrm>
             <a:off x="602974" y="1393196"/>
-            <a:ext cx="6096000" cy="5040000"/>
+            <a:ext cx="6096000" cy="369332"/>
           </a:xfrm>
           <a:prstGeom prst="rect">
             <a:avLst/>
@@ -4696,7 +4696,7 @@
             </a:r>
             <a:r>
               <a:rPr lang="en-US" altLang="zh-CN" dirty="0" err="1"/>
-              <a:t>CHART:category_composition_pie</a:t>
+              <a:t>CHART:customer_segment_composition_pie</a:t>
             </a:r>
             <a:r>
               <a:rPr lang="en-US" altLang="zh-CN" dirty="0"/>
@@ -4803,7 +4803,7 @@
         <p:spPr>
           <a:xfrm>
             <a:off x="616227" y="1436785"/>
-            <a:ext cx="6321286" cy="5040000"/>
+            <a:ext cx="6321286" cy="369332"/>
           </a:xfrm>
           <a:prstGeom prst="rect">
             <a:avLst/>
@@ -4822,7 +4822,7 @@
             </a:r>
             <a:r>
               <a:rPr lang="en-US" altLang="zh-CN" dirty="0" err="1"/>
-              <a:t>CHART:gender_comparison_multi_column</a:t>
+              <a:t>CHART:monthly_trend_line</a:t>
             </a:r>
             <a:r>
               <a:rPr lang="en-US" altLang="zh-CN" dirty="0"/>
@@ -4937,7 +4937,7 @@
         <p:spPr>
           <a:xfrm>
             <a:off x="666091" y="1116450"/>
-            <a:ext cx="6096000" cy="5040000"/>
+            <a:ext cx="6096000" cy="369332"/>
           </a:xfrm>
           <a:prstGeom prst="rect">
             <a:avLst/>
@@ -4956,7 +4956,7 @@
             </a:r>
             <a:r>
               <a:rPr lang="en-US" altLang="zh-CN" dirty="0" err="1"/>
-              <a:t>CHART:order_trend_line</a:t>
+              <a:t>CHART:customer_segment_multi_column</a:t>
             </a:r>
             <a:r>
               <a:rPr lang="en-US" altLang="zh-CN" dirty="0"/>
@@ -5071,7 +5071,7 @@
         <p:spPr>
           <a:xfrm>
             <a:off x="265155" y="1340797"/>
-            <a:ext cx="6096000" cy="5040000"/>
+            <a:ext cx="6096000" cy="369332"/>
           </a:xfrm>
           <a:prstGeom prst="rect">
             <a:avLst/>
@@ -5090,7 +5090,7 @@
             </a:r>
             <a:r>
               <a:rPr lang="en-US" altLang="zh-CN" dirty="0" err="1"/>
-              <a:t>CHART:order_status_composition_pie</a:t>
+              <a:t>CHART:segment_repurchase_vs_return_scatter</a:t>
             </a:r>
             <a:r>
               <a:rPr lang="en-US" altLang="zh-CN" dirty="0"/>
